--- a/presentation/Esenboga_Sunum_TR.pptx
+++ b/presentation/Esenboga_Sunum_TR.pptx
@@ -121,14 +121,14 @@
   <p:extLst>
     <p:ext uri="{521415D9-36F7-43E2-AB2F-B90AF26B5E84}">
       <p14:sectionLst xmlns:p14="http://schemas.microsoft.com/office/powerpoint/2010/main">
-        <p14:section name="Giriş" id="{a8ef302a-ddb9-d048-f308-a77dbdd37d7b}">
+        <p14:section name="Giriş" id="{d7a545ad-c44c-55ea-ef73-feaf9e1d5570}">
           <p14:sldIdLst>
             <p14:sldId id="256"/>
             <p14:sldId id="257"/>
             <p14:sldId id="258"/>
           </p14:sldIdLst>
         </p14:section>
-        <p14:section name="Veri ve yöntem" id="{ddf9a3e7-ec07-1990-fc09-572378b1c32f}">
+        <p14:section name="Veri ve yöntem" id="{52dea1ed-680e-536e-f7b8-e93538acbc58}">
           <p14:sldIdLst>
             <p14:sldId id="259"/>
             <p14:sldId id="260"/>
@@ -136,7 +136,7 @@
             <p14:sldId id="262"/>
           </p14:sldIdLst>
         </p14:section>
-        <p14:section name="Bulgular" id="{b680bacb-fb38-95d8-fbcb-96f7d2c63f60}">
+        <p14:section name="Bulgular" id="{8ff7e378-bf06-ea44-9a55-137892da12e1}">
           <p14:sldIdLst>
             <p14:sldId id="263"/>
             <p14:sldId id="264"/>
@@ -146,7 +146,7 @@
             <p14:sldId id="268"/>
           </p14:sldIdLst>
         </p14:section>
-        <p14:section name="Uygulama ve sonuç" id="{7cb76d21-a725-e026-10b0-db0079848d22}">
+        <p14:section name="Uygulama ve sonuç" id="{67d75f94-31ed-26ea-9494-87d49c3bb3b7}">
           <p14:sldIdLst>
             <p14:sldId id="269"/>
             <p14:sldId id="270"/>
@@ -5945,7 +5945,7 @@
                   <a:schemeClr val="tx1"/>
                 </a:solidFill>
               </a:rPr>
-              <a:t>Açık kaynak: FastAPI + saf HTML/CSS/JS</a:t>
+              <a:t>Canlı sayfa (GitHub Actions, her 30 dk): atasakik.github.io/esenboga-fog-nowcasting</a:t>
             </a:r>
             <a:endParaRPr lang="en-US" sz="1700" dirty="0"/>
           </a:p>

--- a/presentation/Esenboga_Sunum_TR.pptx
+++ b/presentation/Esenboga_Sunum_TR.pptx
@@ -121,14 +121,14 @@
   <p:extLst>
     <p:ext uri="{521415D9-36F7-43E2-AB2F-B90AF26B5E84}">
       <p14:sectionLst xmlns:p14="http://schemas.microsoft.com/office/powerpoint/2010/main">
-        <p14:section name="Giriş" id="{d7a545ad-c44c-55ea-ef73-feaf9e1d5570}">
+        <p14:section name="Giriş" id="{8713353f-20de-5819-ae38-09e5688041c4}">
           <p14:sldIdLst>
             <p14:sldId id="256"/>
             <p14:sldId id="257"/>
             <p14:sldId id="258"/>
           </p14:sldIdLst>
         </p14:section>
-        <p14:section name="Veri ve yöntem" id="{52dea1ed-680e-536e-f7b8-e93538acbc58}">
+        <p14:section name="Veri ve yöntem" id="{f1180c1c-da6e-cf9e-a490-b14a88b2d8d5}">
           <p14:sldIdLst>
             <p14:sldId id="259"/>
             <p14:sldId id="260"/>
@@ -136,7 +136,7 @@
             <p14:sldId id="262"/>
           </p14:sldIdLst>
         </p14:section>
-        <p14:section name="Bulgular" id="{8ff7e378-bf06-ea44-9a55-137892da12e1}">
+        <p14:section name="Bulgular" id="{1bc48ca4-f69c-e8e5-6537-ade879b932b7}">
           <p14:sldIdLst>
             <p14:sldId id="263"/>
             <p14:sldId id="264"/>
@@ -146,7 +146,7 @@
             <p14:sldId id="268"/>
           </p14:sldIdLst>
         </p14:section>
-        <p14:section name="Uygulama ve sonuç" id="{67d75f94-31ed-26ea-9494-87d49c3bb3b7}">
+        <p14:section name="Uygulama ve sonuç" id="{d69b6f98-0379-43b6-78e8-28bf094abf2e}">
           <p14:sldIdLst>
             <p14:sldId id="269"/>
             <p14:sldId id="270"/>
@@ -5891,7 +5891,7 @@
                   <a:schemeClr val="tx1"/>
                 </a:solidFill>
               </a:rPr>
-              <a:t>Her tahmin için SHAP tabanlı etkili faktörler</a:t>
+              <a:t>SHAP tabanlı etkenler, herkesin anlayacağı sade Türkçeyle</a:t>
             </a:r>
             <a:endParaRPr lang="en-US" sz="1700" dirty="0"/>
           </a:p>
